--- a/Day 1/Introduction_to_Data_Science_and_AI.pptx
+++ b/Day 1/Introduction_to_Data_Science_and_AI.pptx
@@ -566,7 +566,7 @@
             </a:ln>
             <a:extLst>
               <a:ext uri="{91240B29-F687-4f45-9708-019B960494DF}">
-                <a14:hiddenLine xmlns:a14="http://schemas.microsoft.com/office/drawing/2010/main" xmlns="" w="9525">
+                <a14:hiddenLine xmlns="" xmlns:a14="http://schemas.microsoft.com/office/drawing/2010/main" w="9525">
                   <a:solidFill>
                     <a:srgbClr val="000000"/>
                   </a:solidFill>
@@ -763,7 +763,7 @@
           <a:p>
             <a:fld id="{5BCAD085-E8A6-8845-BD4E-CB4CCA059FC4}" type="datetimeFigureOut">
               <a:rPr lang="en-US" smtClean="0"/>
-              <a:t>3/19/2025</a:t>
+              <a:t>3/20/2025</a:t>
             </a:fld>
             <a:endParaRPr lang="en-US"/>
           </a:p>
@@ -1647,7 +1647,7 @@
             </a:ln>
             <a:extLst>
               <a:ext uri="{91240B29-F687-4f45-9708-019B960494DF}">
-                <a14:hiddenLine xmlns:a14="http://schemas.microsoft.com/office/drawing/2010/main" xmlns="" w="9525">
+                <a14:hiddenLine xmlns="" xmlns:a14="http://schemas.microsoft.com/office/drawing/2010/main" w="9525">
                   <a:solidFill>
                     <a:srgbClr val="000000"/>
                   </a:solidFill>
@@ -1864,7 +1864,7 @@
           <a:p>
             <a:fld id="{5BCAD085-E8A6-8845-BD4E-CB4CCA059FC4}" type="datetimeFigureOut">
               <a:rPr lang="en-US" smtClean="0"/>
-              <a:t>3/19/2025</a:t>
+              <a:t>3/20/2025</a:t>
             </a:fld>
             <a:endParaRPr lang="en-US"/>
           </a:p>
@@ -2733,7 +2733,7 @@
             </a:ln>
             <a:extLst>
               <a:ext uri="{91240B29-F687-4f45-9708-019B960494DF}">
-                <a14:hiddenLine xmlns:a14="http://schemas.microsoft.com/office/drawing/2010/main" xmlns="" w="9525">
+                <a14:hiddenLine xmlns="" xmlns:a14="http://schemas.microsoft.com/office/drawing/2010/main" w="9525">
                   <a:solidFill>
                     <a:srgbClr val="000000"/>
                   </a:solidFill>
@@ -2862,7 +2862,7 @@
           <a:p>
             <a:fld id="{5BCAD085-E8A6-8845-BD4E-CB4CCA059FC4}" type="datetimeFigureOut">
               <a:rPr lang="en-US" smtClean="0"/>
-              <a:t>3/19/2025</a:t>
+              <a:t>3/20/2025</a:t>
             </a:fld>
             <a:endParaRPr lang="en-US"/>
           </a:p>
@@ -3694,7 +3694,7 @@
             </a:ln>
             <a:extLst>
               <a:ext uri="{91240B29-F687-4f45-9708-019B960494DF}">
-                <a14:hiddenLine xmlns:a14="http://schemas.microsoft.com/office/drawing/2010/main" xmlns="" w="9525">
+                <a14:hiddenLine xmlns="" xmlns:a14="http://schemas.microsoft.com/office/drawing/2010/main" w="9525">
                   <a:solidFill>
                     <a:srgbClr val="000000"/>
                   </a:solidFill>
@@ -3977,7 +3977,7 @@
           <a:p>
             <a:fld id="{5BCAD085-E8A6-8845-BD4E-CB4CCA059FC4}" type="datetimeFigureOut">
               <a:rPr lang="en-US" smtClean="0"/>
-              <a:t>3/19/2025</a:t>
+              <a:t>3/20/2025</a:t>
             </a:fld>
             <a:endParaRPr lang="en-US"/>
           </a:p>
@@ -4809,7 +4809,7 @@
             </a:ln>
             <a:extLst>
               <a:ext uri="{91240B29-F687-4f45-9708-019B960494DF}">
-                <a14:hiddenLine xmlns:a14="http://schemas.microsoft.com/office/drawing/2010/main" xmlns="" w="9525">
+                <a14:hiddenLine xmlns="" xmlns:a14="http://schemas.microsoft.com/office/drawing/2010/main" w="9525">
                   <a:solidFill>
                     <a:srgbClr val="000000"/>
                   </a:solidFill>
@@ -4991,7 +4991,7 @@
           <a:p>
             <a:fld id="{5BCAD085-E8A6-8845-BD4E-CB4CCA059FC4}" type="datetimeFigureOut">
               <a:rPr lang="en-US" smtClean="0"/>
-              <a:t>3/19/2025</a:t>
+              <a:t>3/20/2025</a:t>
             </a:fld>
             <a:endParaRPr lang="en-US"/>
           </a:p>
@@ -5663,7 +5663,7 @@
           <a:p>
             <a:fld id="{5BCAD085-E8A6-8845-BD4E-CB4CCA059FC4}" type="datetimeFigureOut">
               <a:rPr lang="en-US" smtClean="0"/>
-              <a:t>3/19/2025</a:t>
+              <a:t>3/20/2025</a:t>
             </a:fld>
             <a:endParaRPr lang="en-US"/>
           </a:p>
@@ -6536,7 +6536,7 @@
           <a:p>
             <a:fld id="{5BCAD085-E8A6-8845-BD4E-CB4CCA059FC4}" type="datetimeFigureOut">
               <a:rPr lang="en-US" smtClean="0"/>
-              <a:t>3/19/2025</a:t>
+              <a:t>3/20/2025</a:t>
             </a:fld>
             <a:endParaRPr lang="en-US"/>
           </a:p>
@@ -6723,7 +6723,7 @@
           <a:p>
             <a:fld id="{5BCAD085-E8A6-8845-BD4E-CB4CCA059FC4}" type="datetimeFigureOut">
               <a:rPr lang="en-US" smtClean="0"/>
-              <a:t>3/19/2025</a:t>
+              <a:t>3/20/2025</a:t>
             </a:fld>
             <a:endParaRPr lang="en-US"/>
           </a:p>
@@ -7558,7 +7558,7 @@
           </a:ln>
           <a:extLst>
             <a:ext uri="{91240B29-F687-4f45-9708-019B960494DF}">
-              <a14:hiddenLine xmlns:a14="http://schemas.microsoft.com/office/drawing/2010/main" xmlns="" w="9525">
+              <a14:hiddenLine xmlns="" xmlns:a14="http://schemas.microsoft.com/office/drawing/2010/main" w="9525">
                 <a:solidFill>
                   <a:srgbClr val="000000"/>
                 </a:solidFill>
@@ -7672,7 +7672,7 @@
           <a:p>
             <a:fld id="{5BCAD085-E8A6-8845-BD4E-CB4CCA059FC4}" type="datetimeFigureOut">
               <a:rPr lang="en-US" smtClean="0"/>
-              <a:t>3/19/2025</a:t>
+              <a:t>3/20/2025</a:t>
             </a:fld>
             <a:endParaRPr lang="en-US"/>
           </a:p>
@@ -7904,7 +7904,7 @@
           <a:p>
             <a:fld id="{5BCAD085-E8A6-8845-BD4E-CB4CCA059FC4}" type="datetimeFigureOut">
               <a:rPr lang="en-US" smtClean="0"/>
-              <a:t>3/19/2025</a:t>
+              <a:t>3/20/2025</a:t>
             </a:fld>
             <a:endParaRPr lang="en-US"/>
           </a:p>
@@ -8733,7 +8733,7 @@
             </a:ln>
             <a:extLst>
               <a:ext uri="{91240B29-F687-4f45-9708-019B960494DF}">
-                <a14:hiddenLine xmlns:a14="http://schemas.microsoft.com/office/drawing/2010/main" xmlns="" w="9525">
+                <a14:hiddenLine xmlns="" xmlns:a14="http://schemas.microsoft.com/office/drawing/2010/main" w="9525">
                   <a:solidFill>
                     <a:srgbClr val="000000"/>
                   </a:solidFill>
@@ -8915,7 +8915,7 @@
           <a:p>
             <a:fld id="{5BCAD085-E8A6-8845-BD4E-CB4CCA059FC4}" type="datetimeFigureOut">
               <a:rPr lang="en-US" smtClean="0"/>
-              <a:t>3/19/2025</a:t>
+              <a:t>3/20/2025</a:t>
             </a:fld>
             <a:endParaRPr lang="en-US"/>
           </a:p>
@@ -9199,7 +9199,7 @@
           <a:p>
             <a:fld id="{5BCAD085-E8A6-8845-BD4E-CB4CCA059FC4}" type="datetimeFigureOut">
               <a:rPr lang="en-US" smtClean="0"/>
-              <a:t>3/19/2025</a:t>
+              <a:t>3/20/2025</a:t>
             </a:fld>
             <a:endParaRPr lang="en-US"/>
           </a:p>
@@ -9599,7 +9599,7 @@
           <a:p>
             <a:fld id="{5BCAD085-E8A6-8845-BD4E-CB4CCA059FC4}" type="datetimeFigureOut">
               <a:rPr lang="en-US" smtClean="0"/>
-              <a:t>3/19/2025</a:t>
+              <a:t>3/20/2025</a:t>
             </a:fld>
             <a:endParaRPr lang="en-US"/>
           </a:p>
@@ -9729,7 +9729,7 @@
           <a:p>
             <a:fld id="{5BCAD085-E8A6-8845-BD4E-CB4CCA059FC4}" type="datetimeFigureOut">
               <a:rPr lang="en-US" smtClean="0"/>
-              <a:t>3/19/2025</a:t>
+              <a:t>3/20/2025</a:t>
             </a:fld>
             <a:endParaRPr lang="en-US"/>
           </a:p>
@@ -9872,7 +9872,7 @@
           <a:p>
             <a:fld id="{5BCAD085-E8A6-8845-BD4E-CB4CCA059FC4}" type="datetimeFigureOut">
               <a:rPr lang="en-US" smtClean="0"/>
-              <a:t>3/19/2025</a:t>
+              <a:t>3/20/2025</a:t>
             </a:fld>
             <a:endParaRPr lang="en-US"/>
           </a:p>
@@ -10701,7 +10701,7 @@
             </a:ln>
             <a:extLst>
               <a:ext uri="{91240B29-F687-4f45-9708-019B960494DF}">
-                <a14:hiddenLine xmlns:a14="http://schemas.microsoft.com/office/drawing/2010/main" xmlns="" w="9525">
+                <a14:hiddenLine xmlns="" xmlns:a14="http://schemas.microsoft.com/office/drawing/2010/main" w="9525">
                   <a:solidFill>
                     <a:srgbClr val="000000"/>
                   </a:solidFill>
@@ -10894,7 +10894,7 @@
           <a:p>
             <a:fld id="{5BCAD085-E8A6-8845-BD4E-CB4CCA059FC4}" type="datetimeFigureOut">
               <a:rPr lang="en-US" smtClean="0"/>
-              <a:t>3/19/2025</a:t>
+              <a:t>3/20/2025</a:t>
             </a:fld>
             <a:endParaRPr lang="en-US"/>
           </a:p>
@@ -11759,7 +11759,7 @@
             </a:ln>
             <a:extLst>
               <a:ext uri="{91240B29-F687-4f45-9708-019B960494DF}">
-                <a14:hiddenLine xmlns:a14="http://schemas.microsoft.com/office/drawing/2010/main" xmlns="" w="9525">
+                <a14:hiddenLine xmlns="" xmlns:a14="http://schemas.microsoft.com/office/drawing/2010/main" w="9525">
                   <a:solidFill>
                     <a:srgbClr val="000000"/>
                   </a:solidFill>
@@ -11976,7 +11976,7 @@
           <a:p>
             <a:fld id="{5BCAD085-E8A6-8845-BD4E-CB4CCA059FC4}" type="datetimeFigureOut">
               <a:rPr lang="en-US" smtClean="0"/>
-              <a:t>3/19/2025</a:t>
+              <a:t>3/20/2025</a:t>
             </a:fld>
             <a:endParaRPr lang="en-US"/>
           </a:p>
@@ -12809,7 +12809,7 @@
             </a:ln>
             <a:extLst>
               <a:ext uri="{91240B29-F687-4f45-9708-019B960494DF}">
-                <a14:hiddenLine xmlns:a14="http://schemas.microsoft.com/office/drawing/2010/main" xmlns="" w="9525">
+                <a14:hiddenLine xmlns="" xmlns:a14="http://schemas.microsoft.com/office/drawing/2010/main" w="9525">
                   <a:solidFill>
                     <a:srgbClr val="000000"/>
                   </a:solidFill>
@@ -12950,7 +12950,7 @@
           <a:p>
             <a:fld id="{5BCAD085-E8A6-8845-BD4E-CB4CCA059FC4}" type="datetimeFigureOut">
               <a:rPr lang="en-US" smtClean="0"/>
-              <a:t>3/19/2025</a:t>
+              <a:t>3/20/2025</a:t>
             </a:fld>
             <a:endParaRPr lang="en-US"/>
           </a:p>
